--- a/curso_es/pptx/S53.pptx
+++ b/curso_es/pptx/S53.pptx
@@ -3718,7 +3718,7 @@
                 </a:solidFill>
                 <a:latin typeface="Fredoka"/>
               </a:rPr>
-              <a:t>Caso 1 · Iker y su hermana</a:t>
+              <a:t>Caso 1 · Un chico y su hermana</a:t>
             </a:r>
           </a:p>
         </p:txBody>
@@ -3800,7 +3800,7 @@
                 </a:solidFill>
                 <a:latin typeface="Nunito Sans"/>
               </a:rPr>
-              <a:t>Los dos buscan «Athletic» en YouTube. A Iker le salen goles. A su hermana, entrevistas y fútbol femenino.</a:t>
+              <a:t>Los dos buscan «Athletic» en YouTube. A él le salen goles. A su hermana, entrevistas y fútbol femenino.</a:t>
             </a:r>
           </a:p>
         </p:txBody>
@@ -3873,7 +3873,7 @@
                 </a:solidFill>
                 <a:latin typeface="Nunito Sans"/>
               </a:rPr>
-              <a:t>A Iker le enseña goles porque es lo que más mira.</a:t>
+              <a:t>A él le enseña goles porque es lo que más mira.</a:t>
             </a:r>
           </a:p>
           <a:p>
@@ -4109,7 +4109,7 @@
                 </a:solidFill>
                 <a:latin typeface="Nunito Sans"/>
               </a:rPr>
-              <a:t>Leire ve dos vídeos de gente discutiendo. Al día siguiente, le salen muchos más vídeos de discusiones.</a:t>
+              <a:t>Una chica ve dos vídeos de gente discutiendo. Al día siguiente, le salen muchos más vídeos de discusiones.</a:t>
             </a:r>
           </a:p>
         </p:txBody>
@@ -4207,7 +4207,7 @@
                 </a:solidFill>
                 <a:latin typeface="Nunito Sans"/>
               </a:rPr>
-              <a:t>Leire puede acabar creyendo que todo el mundo está enfadado.</a:t>
+              <a:t>Esa chica puede acabar creyendo que todo el mundo está enfadado.</a:t>
             </a:r>
           </a:p>
           <a:p>
@@ -4232,7 +4232,7 @@
                 </a:solidFill>
                 <a:latin typeface="Nunito Sans"/>
               </a:rPr>
-              <a:t>Conclusión: el algoritmo busca que siga mirando. Lo que ve Leire es una selección, no el mundo.</a:t>
+              <a:t>Conclusión: el algoritmo busca que siga mirando. Lo que ve esa chica es una selección, no el mundo.</a:t>
             </a:r>
           </a:p>
         </p:txBody>
@@ -4418,7 +4418,7 @@
                 </a:solidFill>
                 <a:latin typeface="Nunito Sans"/>
               </a:rPr>
-              <a:t>Dylan: «Estoy en una burbuja por culpa de TikTok». Pero solo sigue cuentas que piensan como él y bloquea a las demás.</a:t>
+              <a:t>Un chico: «Estoy en una burbuja por culpa de TikTok». Pero solo sigue cuentas que piensan como él y bloquea a las demás.</a:t>
             </a:r>
           </a:p>
         </p:txBody>
@@ -4774,7 +4774,7 @@
                 </a:solidFill>
                 <a:latin typeface="Fredoka"/>
               </a:rPr>
-              <a:t>Cuatro formas de salir</a:t>
+              <a:t>Lo que hacen algunas personas para decidir ellas (elige si te sirve alguno)</a:t>
             </a:r>
           </a:p>
         </p:txBody>
@@ -6457,7 +6457,7 @@
                 </a:solidFill>
                 <a:latin typeface="Nunito Sans"/>
               </a:rPr>
-              <a:t>Iker y su hermana buscan «Athletic» en YouTube a la vez. A Iker le salen goles. A ella, entrevistas y fútbol femenino. Mismas palabras.</a:t>
+              <a:t>Un chico y su hermana buscan «Athletic» en YouTube a la vez. A él le salen goles. A ella, entrevistas y fútbol femenino. Mismas palabras.</a:t>
             </a:r>
           </a:p>
         </p:txBody>
